--- a/assets/pptx/catalog-55.pptx
+++ b/assets/pptx/catalog-55.pptx
@@ -3253,7 +3253,7 @@
                 <a:ea typeface="Ebrima"/>
                 <a:cs typeface="Ebrima"/>
               </a:rPr>
-              <a:t>- የፍቅር አምላክ የሁሉም (3x)</a:t>
+              <a:t>- የፍቅር አምላክ የሁሉም 3x</a:t>
             </a:r>
           </a:p>
           <a:p>
@@ -3289,7 +3289,7 @@
                 <a:ea typeface="Ebrima"/>
                 <a:cs typeface="Ebrima"/>
               </a:rPr>
-              <a:t>ሥሙን ስጠራው የመድኃኒዓለም (2x)</a:t>
+              <a:t>ሥሙን ስጠራው የመድኃኒዓለም 2x</a:t>
             </a:r>
           </a:p>
         </p:txBody>
@@ -3356,7 +3356,7 @@
                 <a:ea typeface="Ebrima"/>
                 <a:cs typeface="Ebrima"/>
               </a:rPr>
-              <a:t>መድሃኒዓለም ለዘለዓለም አይጠገብም (አሃ) (2x)</a:t>
+              <a:t>መድሃኒዓለም ለዘለዓለም አይጠገብም አሃ 2x</a:t>
             </a:r>
           </a:p>
           <a:p>
@@ -3392,7 +3392,7 @@
                 <a:ea typeface="Ebrima"/>
                 <a:cs typeface="Ebrima"/>
               </a:rPr>
-              <a:t>የእኔ ኢየሱስ ዘለዓለም ንገሥ (2x)</a:t>
+              <a:t>የእኔ ኢየሱስ ዘለዓለም ንገሥ 2x</a:t>
             </a:r>
           </a:p>
         </p:txBody>
@@ -3665,7 +3665,7 @@
                 <a:ea typeface="Ebrima"/>
                 <a:cs typeface="Ebrima"/>
               </a:rPr>
-              <a:t>የኢትዮጵያ አምላክ (2x) ሥምህ ይባረክ (2x)</a:t>
+              <a:t>የኢትዮጵያ አምላክ 2x ሥምህ ይባረክ 2x</a:t>
             </a:r>
           </a:p>
           <a:p>
@@ -3804,7 +3804,7 @@
                 <a:ea typeface="Ebrima"/>
                 <a:cs typeface="Ebrima"/>
               </a:rPr>
-              <a:t>- የፍቅር አምላክ የሁሉም (3x)</a:t>
+              <a:t>- የፍቅር አምላክ የሁሉም 3x</a:t>
             </a:r>
           </a:p>
           <a:p>
@@ -3840,7 +3840,7 @@
                 <a:ea typeface="Ebrima"/>
                 <a:cs typeface="Ebrima"/>
               </a:rPr>
-              <a:t>ሥሙን ስጠራው የመድኃኒዓለም (2x)</a:t>
+              <a:t>ሥሙን ስጠራው የመድኃኒዓለም 2x</a:t>
             </a:r>
           </a:p>
         </p:txBody>
@@ -3907,7 +3907,7 @@
                 <a:ea typeface="Ebrima"/>
                 <a:cs typeface="Ebrima"/>
               </a:rPr>
-              <a:t>መድሃኒዓለም ለዘለዓለም አይጠገብም (አሃ) (2x)</a:t>
+              <a:t>መድሃኒዓለም ለዘለዓለም አይጠገብም አሃ 2x</a:t>
             </a:r>
           </a:p>
           <a:p>
@@ -3943,7 +3943,7 @@
                 <a:ea typeface="Ebrima"/>
                 <a:cs typeface="Ebrima"/>
               </a:rPr>
-              <a:t>የእኔ ኢየሱስ ዘለዓለም ንገሥ (2x)</a:t>
+              <a:t>የእኔ ኢየሱስ ዘለዓለም ንገሥ 2x</a:t>
             </a:r>
           </a:p>
         </p:txBody>
@@ -4010,7 +4010,7 @@
                 <a:ea typeface="Ebrima"/>
                 <a:cs typeface="Ebrima"/>
               </a:rPr>
-              <a:t>አሃሃ ኢየሱስ (2x) ኢየሱስ የምለው</a:t>
+              <a:t>አሃሃ ኢየሱስ 2x ኢየሱስ የምለው</a:t>
             </a:r>
           </a:p>
           <a:p>
@@ -4216,7 +4216,7 @@
                 <a:ea typeface="Ebrima"/>
                 <a:cs typeface="Ebrima"/>
               </a:rPr>
-              <a:t>አሸንፎኝ በፍቅር አደረገኝ ደቀ መዝሙር (2x)</a:t>
+              <a:t>አሸንፎኝ በፍቅር አደረገኝ ደቀ መዝሙር 2x</a:t>
             </a:r>
           </a:p>
           <a:p>
@@ -4234,7 +4234,7 @@
                 <a:ea typeface="Ebrima"/>
                 <a:cs typeface="Ebrima"/>
               </a:rPr>
-              <a:t>ከፍቶልኝ ትልቁን በር አደረገኝ ደቀ መዝሙር(2x)</a:t>
+              <a:t>ከፍቶልኝ ትልቁን በር አደረገኝ ደቀ መዝሙር2x</a:t>
             </a:r>
           </a:p>
         </p:txBody>
